--- a/ppt/BigData07-S3.pptx
+++ b/ppt/BigData07-S3.pptx
@@ -4513,7 +4513,7 @@
           <a:p>
             <a:r>
               <a:rPr lang="fr-FR" sz="2000" dirty="0"/>
-              <a:t>Glacier Instant </a:t>
+              <a:t>S3 Glacier Instant </a:t>
             </a:r>
             <a:r>
               <a:rPr lang="fr-FR" sz="2000" dirty="0" err="1"/>
